--- a/assets/pptx/catalog-3440.pptx
+++ b/assets/pptx/catalog-3440.pptx
@@ -3403,7 +3403,7 @@
                 <a:ea typeface="Ebrima"/>
                 <a:cs typeface="Ebrima"/>
               </a:rPr>
-              <a:t>(ገረመኝ ጥበቃህ</a:t>
+              <a:t>ገረመኝ ጥበቃህ</a:t>
             </a:r>
           </a:p>
           <a:p>
@@ -3421,7 +3421,7 @@
                 <a:ea typeface="Ebrima"/>
                 <a:cs typeface="Ebrima"/>
               </a:rPr>
-              <a:t>ደነቀኝ (ማዳንህ)3</a:t>
+              <a:t>ደነቀኝ ማዳንህ3</a:t>
             </a:r>
           </a:p>
           <a:p>
@@ -3439,7 +3439,7 @@
                 <a:ea typeface="Ebrima"/>
                 <a:cs typeface="Ebrima"/>
               </a:rPr>
-              <a:t>ያለፍኩትን ዞር ብዬ አሁን ሳይ )2</a:t>
+              <a:t>ያለፍኩትን ዞር ብዬ አሁን ሳይ 2</a:t>
             </a:r>
           </a:p>
         </p:txBody>
@@ -3542,7 +3542,7 @@
                 <a:ea typeface="Ebrima"/>
                 <a:cs typeface="Ebrima"/>
               </a:rPr>
-              <a:t>(መንፈስህን አብዝተህ ያለ ልክ ጸጋ</a:t>
+              <a:t>መንፈስህን አብዝተህ ያለ ልክ ጸጋ</a:t>
             </a:r>
           </a:p>
           <a:p>
@@ -3560,7 +3560,7 @@
                 <a:ea typeface="Ebrima"/>
                 <a:cs typeface="Ebrima"/>
               </a:rPr>
-              <a:t>ስንቴ አስመለጥኸው ከክፉ አደጋ)2</a:t>
+              <a:t>ስንቴ አስመለጥኸው ከክፉ አደጋ2</a:t>
             </a:r>
           </a:p>
         </p:txBody>
@@ -3627,7 +3627,7 @@
                 <a:ea typeface="Ebrima"/>
                 <a:cs typeface="Ebrima"/>
               </a:rPr>
-              <a:t>(ገረመኝ ጥበቃህ</a:t>
+              <a:t>ገረመኝ ጥበቃህ</a:t>
             </a:r>
           </a:p>
           <a:p>
@@ -3645,7 +3645,7 @@
                 <a:ea typeface="Ebrima"/>
                 <a:cs typeface="Ebrima"/>
               </a:rPr>
-              <a:t>ደነቀኝ (ማዳንህ)3</a:t>
+              <a:t>ደነቀኝ ማዳንህ3</a:t>
             </a:r>
           </a:p>
           <a:p>
@@ -3663,7 +3663,7 @@
                 <a:ea typeface="Ebrima"/>
                 <a:cs typeface="Ebrima"/>
               </a:rPr>
-              <a:t>ያለፍኩትን ዞር ብዬ አሁን ሳይ )2</a:t>
+              <a:t>ያለፍኩትን ዞር ብዬ አሁን ሳይ 2</a:t>
             </a:r>
           </a:p>
         </p:txBody>
@@ -3815,7 +3815,7 @@
                 <a:ea typeface="Ebrima"/>
                 <a:cs typeface="Ebrima"/>
               </a:rPr>
-              <a:t>(ገረመኝ ጥበቃህ</a:t>
+              <a:t>ገረመኝ ጥበቃህ</a:t>
             </a:r>
           </a:p>
           <a:p>
@@ -3833,7 +3833,7 @@
                 <a:ea typeface="Ebrima"/>
                 <a:cs typeface="Ebrima"/>
               </a:rPr>
-              <a:t>ደነቀኝ (ማዳንህ)3</a:t>
+              <a:t>ደነቀኝ ማዳንህ3</a:t>
             </a:r>
           </a:p>
           <a:p>
@@ -3851,7 +3851,7 @@
                 <a:ea typeface="Ebrima"/>
                 <a:cs typeface="Ebrima"/>
               </a:rPr>
-              <a:t>ያለፍኩትን ዞር ብዬ አሁን ሳይ )2</a:t>
+              <a:t>ያለፍኩትን ዞር ብዬ አሁን ሳይ 2</a:t>
             </a:r>
           </a:p>
         </p:txBody>
